--- a/dist/초1/정보·AI/기기와절차/초1_정보·AI_기기와절차_01_디지털기기와순서_학생용.pptx
+++ b/dist/초1/정보·AI/기기와절차/초1_정보·AI_기기와절차_01_디지털기기와순서_학생용.pptx
@@ -119,20 +119,20 @@
   <p:extLst>
     <p:ext uri="{521415D9-36F7-43E2-AB2F-B90AF26B5E84}">
       <p14:sectionLst xmlns:p14="http://schemas.microsoft.com/office/powerpoint/2010/main">
-        <p14:section name="도입" id="{2e7513df-8a8f-760a-7cf9-f6cf00629478}">
+        <p14:section name="도입" id="{cf39064d-6f77-95b9-599e-1179a53b6d33}">
           <p14:sldIdLst>
             <p14:sldId id="256"/>
             <p14:sldId id="257"/>
           </p14:sldIdLst>
         </p14:section>
-        <p14:section name="개념" id="{1669a135-a003-fb49-c42b-65d310d62a2f}">
+        <p14:section name="개념" id="{9ae28310-28b8-608a-7084-6acaa349b870}">
           <p14:sldIdLst>
             <p14:sldId id="258"/>
             <p14:sldId id="259"/>
             <p14:sldId id="262"/>
           </p14:sldIdLst>
         </p14:section>
-        <p14:section name="연습" id="{2c090730-2d83-a556-3ac6-36d5137edbdf}">
+        <p14:section name="연습" id="{04ffa675-2feb-cf41-74c7-92deaf265a94}">
           <p14:sldIdLst>
             <p14:sldId id="260"/>
             <p14:sldId id="261"/>
@@ -140,24 +140,24 @@
             <p14:sldId id="264"/>
           </p14:sldIdLst>
         </p14:section>
-        <p14:section name="개념" id="{db19a51b-2780-4062-6492-4fbb3e894cad}">
+        <p14:section name="개념" id="{06b5a98d-6427-d971-7d06-ae40a7cf4e7f}">
           <p14:sldIdLst/>
         </p14:section>
-        <p14:section name="연습" id="{8f0577ae-7d92-60d5-eecf-b835bcc12eff}">
+        <p14:section name="연습" id="{6f9cbc34-8338-fd49-a0e8-b3463b6af09c}">
           <p14:sldIdLst/>
         </p14:section>
-        <p14:section name="확인" id="{bde418de-18de-f728-0dd3-65f2cb387c1c}">
+        <p14:section name="확인" id="{9b0c99fe-efda-1bc2-a722-b8abb7a757bc}">
           <p14:sldIdLst>
             <p14:sldId id="265"/>
             <p14:sldId id="266"/>
           </p14:sldIdLst>
         </p14:section>
-        <p14:section name="정리" id="{1768db36-ff03-c4c3-6099-c51bfbbd0ada}">
+        <p14:section name="정리" id="{7766ae93-4148-5b07-36f6-081c396a2678}">
           <p14:sldIdLst>
             <p14:sldId id="267"/>
           </p14:sldIdLst>
         </p14:section>
-        <p14:section name="보충" id="{3bd71d13-4238-7f14-b3f9-58bae5f5dc9d}">
+        <p14:section name="보충" id="{9afa6701-8726-edd2-6c3b-52d56b67a6dd}">
           <p14:sldIdLst>
             <p14:sldId id="268"/>
           </p14:sldIdLst>
